--- a/submission/Team_Osprey_Vendor_AI_Footprint.pptx
+++ b/submission/Team_Osprey_Vendor_AI_Footprint.pptx
@@ -751,7 +751,7 @@
           </a:p>
           <a:p>
             <a:r>
-              <a:t>- V-001 AutomWorx: Inconclusive; risk Medium; strongest excerpt V-001-E-0001 Affiliate website.</a:t>
+              <a:t>- V-001 AutomWorx: Inconclusive; risk Medium; strongest excerpt V-001-E-0001 Blog post.</a:t>
             </a:r>
           </a:p>
           <a:p>
@@ -896,7 +896,7 @@
           </a:p>
           <a:p>
             <a:r>
-              <a:t>4. (0:40) Evidence review (HC2): Fiserv's excerpt V-002-E-0002 with its screenshot, then Re-verify; reject AutomWorx's trap V-001-E-0138, which fails the definition test; compare Gemini with the rules on AutomWorx (90 disagreements).</a:t>
+              <a:t>4. (0:40) Evidence review (HC2): Fiserv's excerpt V-002-E-0002 with its screenshot, then Re-verify; reject AutomWorx's trap V-001-E-0140, which fails the definition test; compare Gemini with the rules on AutomWorx (90 disagreements).</a:t>
             </a:r>
           </a:p>
           <a:p>
@@ -906,7 +906,7 @@
           </a:p>
           <a:p>
             <a:r>
-              <a:t>6. (0:30) Export and check: Build and open the workbook: V-000 untouched, Evidence Log and Coverage Log appended, with 14 screenshots in Evidence Images; the integrity check passes.</a:t>
+              <a:t>6. (0:30) Export and check: Build and open the workbook: V-000 untouched, Evidence Log and Coverage Log appended, with 9 screenshots in Evidence Images; the integrity check passes.</a:t>
             </a:r>
           </a:p>
           <a:p>
@@ -1086,7 +1086,7 @@
           </a:p>
           <a:p>
             <a:r>
-              <a:t>Terms register, robots.txt and rate limits before every request; barred sites captured by hand.</a:t>
+              <a:t>Terms register, robots.txt and rate limits before every request; barred hosts logged as gaps, not crawled.</a:t>
             </a:r>
           </a:p>
           <a:p>
@@ -1636,7 +1636,7 @@
           </a:p>
           <a:p>
             <a:r>
-              <a:t>- V-001 AutomWorx: High tier; Inconclusive (roughly even chance, confidence Moderate); AI risk Medium, provisional with a ceiling of Critical if confirmed. Evidence: V-001-E-0001, V-001-E-0002. Flip: Confirmation that the AI platform of the inferred affiliate Labarum AI delivers Meridian work would make the verdict Yes and could raise the class to Critical. Next: Issue questionnaire items Q1 to Q4 within 15 business days to establish whether AI is used in the service, which Meridian data it touches, which model providers are involved and what human review applies.</a:t>
+              <a:t>- V-001 AutomWorx: High tier; Inconclusive (roughly even chance, confidence Moderate); AI risk Medium, provisional with a ceiling of Critical if confirmed. Evidence: V-001-E-0001, V-001-E-0002. Flip: Confirmation that the AI capability the vendor advertises is used in Meridian's service would make the verdict Yes and could raise the class to Critical. Next: Issue questionnaire items Q1 to Q4 within 15 business days to establish whether AI is used in the service, which Meridian data it touches, which model providers are involved and what human review applies.</a:t>
             </a:r>
           </a:p>
           <a:p>
@@ -1746,12 +1746,12 @@
           </a:p>
           <a:p>
             <a:r>
-              <a:t>AI risk: Medium, provisional; ceiling Critical if confirmed; ARP 17 of 18 (E 3, K 3, TP 2, TG 3). Flip: Confirmation that the AI platform of the inferred affiliate Labarum AI delivers Meridian work would make the verdict Yes and could raise the class to Critical.</a:t>
-            </a:r>
-          </a:p>
-          <a:p>
-            <a:r>
-              <a:t>Evidence Log IDs: V-001-E-0001, V-001-E-0002. Trap kept in the log, never cited: V-001-E-0138.</a:t>
+              <a:t>AI risk: Medium, provisional; ceiling Critical if confirmed; ARP 17 of 18 (E 3, K 3, TP 2, TG 3). Flip: Confirmation that the AI capability the vendor advertises is used in Meridian's service would make the verdict Yes and could raise the class to Critical.</a:t>
+            </a:r>
+          </a:p>
+          <a:p>
+            <a:r>
+              <a:t>Evidence Log IDs: V-001-E-0001, V-001-E-0002. Trap kept in the log, never cited: V-001-E-0140.</a:t>
             </a:r>
           </a:p>
           <a:p>
@@ -1761,12 +1761,12 @@
           </a:p>
           <a:p>
             <a:r>
-              <a:t>Column P: Indicator — inferred affiliate, not confirmed, Affiliate website, Labarum AI, labarum.ai (retrieved 03-10-2026; Evidence Log V-001-E-0001): "Twenty years of platform depth across 250+ Fortune 1000 accounts gets extended by AI infrastructure built to run where customer data runs." Indicator — inferred affiliate, not confirmed, Affiliate website, Labarum AI, labarum.ai/public-sector/ (retrieved 03-10-2026; Evidence Log V-001-E-0002): "Agencies engage Labarum AI for enterprise workload automation migrations, managed support of production scheduling environments, modernization of legacy schedulers, and the AI-enabled operating model that brings federal-grade discipline to the work." Negative finding — named AI providers or an AI sub-processor list, an AI policy or AI governance attestation, and AI data-use terms not found on the vendor's legal and trust pages (Coverage Log V-001-C-01). Negative finding — an SEC registration not found on EDGAR (Coverage Log V-001-C-02). Negative finding — an applicant tracking system not found on the vendor's website (Coverage Log V-001-C-04). Negative finding — AI-provider verification tokens not found on the vendor's DNS records (Coverage Log V-001-C-05). Entries are recorded in the Evidence Log sheet with retrieval dates and screenshots.</a:t>
-            </a:r>
-          </a:p>
-          <a:p>
-            <a:r>
-              <a:t>Column Q: No usage pathway is evidenced in public material. AI options of Broadcom, a platform supplier the vendor uses (Gemini, OpenAI, Ollama, Google, and VMware Private AI), are a relationship indicator, not a confirmed sub-processor (V-001-E-0003, V-001-E-0004, V-001-E-0005 and 70 more). AI and generative AI (large language models) described by an inferred affiliate are not confirmed as used in the service (V-001-E-0001, V-001-E-0002, V-001-E-0076 and 14 more). The extent of AI use within the service itself, Meridian data reaching AI models, and human review over AI output is undetermined from public material and is carried forward to the vendor questionnaire.</a:t>
+              <a:t>Column P: Marketing statement — not confirmatory, Blog post, AutomWorx, 26-08-2025, www.automworx.com/what-is-ai-enablement-in-automic-workload-automation/ (retrieved 03-10-2026; Evidence Log V-001-E-0001): "The convergence of AI and workload automation marks a significant leap forward for enterprises." Marketing statement — not confirmatory, Blog post, AutomWorx, 03-09-2026, www.automworx.com/what-workload-automation-orchestration-actually-looks-like/ (retrieved 03-10-2026; Evidence Log V-001-E-0002): "A lot of AI and infrastructure modernization talk stays focused on the infrastructure itself, faster provisioning, more flexible platforms, better tooling." Negative finding — named AI providers or an AI sub-processor list, an AI policy or AI governance attestation, and AI data-use terms not found on the vendor's legal and trust pages (Coverage Log V-001-C-01). Negative finding — an SEC registration not found on EDGAR (Coverage Log V-001-C-02). Negative finding — an applicant tracking system not found on the vendor's website (Coverage Log V-001-C-04). Negative finding — AI-provider verification tokens not found on the vendor's DNS records (Coverage Log V-001-C-05). Entries are recorded in the Evidence Log sheet with retrieval dates and screenshots.</a:t>
+            </a:r>
+          </a:p>
+          <a:p>
+            <a:r>
+              <a:t>Column Q: No usage pathway is evidenced in public material. AI options of Broadcom, a platform supplier the vendor uses (Gemini, OpenAI, Ollama, Google, and VMware Private AI), are a relationship indicator, not a confirmed sub-processor (V-001-E-0003, V-001-E-0004, V-001-E-0005 and 70 more). Marketing or forward-looking statements about AI are not confirmatory (V-001-E-0001, V-001-E-0002). The extent of AI use within the service itself, Meridian data reaching AI models, and human review over AI output is undetermined from public material and is carried forward to the vendor questionnaire.</a:t>
             </a:r>
           </a:p>
           <a:p>
@@ -1776,7 +1776,7 @@
           </a:p>
           <a:p>
             <a:r>
-              <a:t>Column T: Risk class: Medium (Provisional). Data involved, per the vendor profile: no direct customer data; privileged access to production job schedules, among others. Public evidence is limited to an inferred affiliate's AI capability (V-001-E-0001, V-001-E-0002), and none of it confirms AI use in the service. There is a roughly even chance that the vendor uses AI in the service supporting batch scheduling across core systems. Confidence is moderate because the finding rests on two or more promotional or second-party sources. Operational dependency is high, and the criticality tier is High. None of the six transparency checks is publicly disclosed; contractual disclosure is unknown. Score: exposure 3/3 (assumed), decision impact 3/3 (assumed), tier 2, transparency gap 3 → 17 of 18 = Critical. The materiality gate lowers the class to Medium. Provisional; ceiling Critical if confirmed. Confirmation that the AI platform of the inferred affiliate Labarum AI delivers Meridian work would make the verdict Yes and could raise the class to Critical.</a:t>
+              <a:t>Column T: Risk class: Medium (Provisional). Data involved, per the vendor profile: no direct customer data; privileged access to production job schedules, among others. Public evidence is limited to marketing statements (V-001-E-0001, V-001-E-0002), and none of it confirms AI use in the service. There is a roughly even chance that the vendor uses AI in the service supporting batch scheduling across core systems. Confidence is moderate because the finding rests on two or more promotional or second-party sources. Operational dependency is high, and the criticality tier is High. None of the six transparency checks is publicly disclosed; contractual disclosure is unknown. Score: exposure 3/3 (assumed), decision impact 3/3 (assumed), tier 2, transparency gap 3 → 17 of 18 = Critical. The materiality gate lowers the class to Medium. Provisional; ceiling Critical if confirmed. Confirmation that the AI capability the vendor advertises is used in Meridian's service would make the verdict Yes and could raise the class to Critical.</a:t>
             </a:r>
           </a:p>
           <a:p>
@@ -1881,17 +1881,17 @@
           </a:p>
           <a:p>
             <a:r>
-              <a:t>Column Q: Two usage pathways are indicated. First, agentic AI in the vendor's delivery operations, described as "resolve our tickets", "resolve client issues", and "onboarding", applied to tickets (V-002-E-0001, V-002-E-0014, V-002-E-0015). Second, generative AI and machine learning in the vendor's software development, described as "code generation" and "fraud detection", applied to code; a third-party source names GitHub Copilot (V-002-E-0002, V-002-E-0012, V-002-E-0013 and 1 more). Anthropic and OpenAI domain-verification tokens in the vendor's DNS records are a relationship indicator, not a confirmed sub-processor (V-002-E-0006, V-002-E-0007). Named AI relationships (OpenAI, Personetics, and Devin) are a relationship indicator, not a confirmed sub-processor (V-002-E-0003, V-002-E-0004, V-002-E-0005 and 4 more). The extent of human review over AI output and retention or training use of Meridian data is undetermined from public material and is carried forward to the vendor questionnaire.</a:t>
-            </a:r>
-          </a:p>
-          <a:p>
-            <a:r>
-              <a:t>Column R: Named by the vendor: OpenAI — named as an AI partner or provider (SEC Form DEFA14A; Evidence Log V-002-E-0003, V-002-E-0004); Personetics — named as an AI partner or provider (SEC Form DEFA14A; Evidence Log V-002-E-0005); agentOS — agentic AI in the service itself (SEC Form DEFA14A; Evidence Log V-002-E-0030, V-002-E-0031); Finxact — AI in the service itself (SEC Form 10-K; Evidence Log V-002-E-0118); NVIDIA — machine learning in the service itself (SEC Form DEFA14A; Evidence Log V-002-E-0152). The vendor's legal and trust pages could not be fully searched (Coverage Log V-002-C-01), so a public sub-processor register is not ruled out. Hosting region, retention and training terms are not stated publicly and are raised with the vendor through Meridian's questionnaire.</a:t>
-            </a:r>
-          </a:p>
-          <a:p>
-            <a:r>
-              <a:t>Column T: Risk class: High. Data involved, per the vendor profile: full customer master, balances and transactions for 1.4 million customers (annual volume: 240 million transactions). Public evidence shows agentic AI in the vendor's delivery operations (V-002-E-0001, V-002-E-0014, V-002-E-0015). It is likely that the vendor uses AI in the service supporting core account processing and servicing. Confidence is low because the search of legal and trust pages (still pending), product pages and newsroom (still pending) and job postings (still pending) was not completed. Operational dependency is critical, and the criticality tier is Critical. Score: exposure 2/3, decision impact 3/3 (assumed), tier 3, transparency gap 2 → 15 of 18 = Critical. An escalation floor of High applies: a provider named only by a third party. The Probable verdict caps the class at High. Ceiling Critical if confirmed. Independent confirmation of AI use in the service itself would lift the Probable cap and raise the class to Critical.</a:t>
+              <a:t>Column Q: Two usage pathways are indicated. First, agentic AI in the vendor's delivery operations, described as "resolve our tickets", "resolve client issues", and "onboarding", applied to tickets (V-002-E-0001, V-002-E-0012, V-002-E-0013). Second, generative AI and machine learning in the vendor's software development, described as "code generation" and "fraud detection", applied to code; a third-party source names GitHub Copilot (V-002-E-0002, V-002-E-0010, V-002-E-0011 and 1 more). Anthropic and OpenAI domain-verification tokens in the vendor's DNS records are a relationship indicator, not a confirmed sub-processor (V-002-E-0006, V-002-E-0007). Named AI relationships (OpenAI and Personetics) are a relationship indicator, not a confirmed sub-processor (V-002-E-0003, V-002-E-0004, V-002-E-0005 and 2 more). The extent of human review over AI output and retention or training use of Meridian data is undetermined from public material and is carried forward to the vendor questionnaire.</a:t>
+            </a:r>
+          </a:p>
+          <a:p>
+            <a:r>
+              <a:t>Column R: Named by the vendor: OpenAI — named as an AI partner or provider (SEC Form DEFA14A; Evidence Log V-002-E-0003, V-002-E-0004); Personetics — named as an AI partner or provider (SEC Form DEFA14A; Evidence Log V-002-E-0005); agentOS — agentic AI in the service itself (SEC Form DEFA14A; Evidence Log V-002-E-0030); Finxact — AI in the service itself (SEC Form 10-K; Evidence Log V-002-E-0118); NVIDIA — machine learning in the service itself (SEC Form DEFA14A; Evidence Log V-002-E-0152). The vendor's legal and trust pages could not be fully searched (Coverage Log V-002-C-01), so a public sub-processor register is not ruled out. Hosting region, retention and training terms are not stated publicly and are raised with the vendor through Meridian's questionnaire.</a:t>
+            </a:r>
+          </a:p>
+          <a:p>
+            <a:r>
+              <a:t>Column T: Risk class: High. Data (vendor profile): full customer master, balances and transactions for 1.4 million customers. Public evidence shows agentic AI in the vendor's delivery operations (V-002-E-0001, V-002-E-0012, V-002-E-0013). It is likely that the vendor uses AI in the service supporting core account processing and servicing. Confidence is low: legal/trust, product/newsroom and job-posting searches were not completed. Operational dependency is critical, and the criticality tier is Critical. Four of six transparency checks are not publicly disclosed; contractual disclosure is unknown. Score: exposure 2/3, decision impact 3/3 (assumed), tier 3, transparency gap 2 → 15 of 18 = Critical. The Probable verdict caps the class at High. Independent confirmation of AI use in the service would lift the Probable cap to Critical. Decision impact 3 is assumed (payment-path role); it falls if the vendor confirms AI outputs are advisory or human-reviewed.</a:t>
             </a:r>
           </a:p>
           <a:p>
@@ -1996,7 +1996,7 @@
           </a:p>
           <a:p>
             <a:r>
-              <a:t>Column Q: No usage pathway is evidenced in public material. AI options of OpenText, a platform supplier the vendor uses, are a relationship indicator, not a confirmed sub-processor (V-003-E-0001, V-003-E-0002, V-003-E-0003 and 7 more). Whether AI is used in the service is not evidenced by public material, so written confirmation is carried forward to the vendor questionnaire.</a:t>
+              <a:t>Column Q: No usage pathway is evidenced in public material. AI options of OpenText, a platform supplier the vendor uses, are a relationship indicator, not a confirmed sub-processor (V-003-E-0001, V-003-E-0002, V-003-E-0003 and 6 more). Whether AI is used in the service is not evidenced by public material, so written confirmation is carried forward to the vendor questionnaire.</a:t>
             </a:r>
           </a:p>
           <a:p>
@@ -2226,7 +2226,7 @@
           </a:p>
           <a:p>
             <a:r>
-              <a:t>Column Q: One usage pathway is indicated. First, agentic AI and machine learning in the vendor's delivery operations, described as "anomaly detection", "payment validation", and "data analysis", applied to payments, using Eliza, producing advisory output only (V-005-E-0001, V-005-E-0002, V-005-E-0003 and 6 more). Anthropic and OpenAI domain-verification tokens in the vendor's DNS records are a relationship indicator, not a confirmed sub-processor (V-005-E-0005, V-005-E-0006). Named AI relationships (OpenAI, Gemini Enterprise, Google Cloud, and Eliza) are a relationship indicator, not a confirmed sub-processor (V-005-E-0004, V-005-E-0007). The extent of human review over AI output and retention or training use of Meridian data is undetermined from public material and is carried forward to the vendor questionnaire.</a:t>
+              <a:t>Column Q: One usage pathway is indicated. First, agentic AI and machine learning in the vendor's delivery operations, described as "anomaly detection", "payment validation", and "data analysis", applied to payments, using Eliza, producing advisory output only (V-005-E-0001, V-005-E-0002, V-005-E-0003 and 5 more). Anthropic and OpenAI domain-verification tokens in the vendor's DNS records are a relationship indicator, not a confirmed sub-processor (V-005-E-0005, V-005-E-0006). Named AI relationships (OpenAI, Gemini Enterprise, Google Cloud, and Eliza) are a relationship indicator, not a confirmed sub-processor (V-005-E-0004, V-005-E-0007). The extent of human review over AI output and retention or training use of Meridian data is undetermined from public material and is carried forward to the vendor questionnaire.</a:t>
             </a:r>
           </a:p>
           <a:p>
@@ -2236,7 +2236,7 @@
           </a:p>
           <a:p>
             <a:r>
-              <a:t>Column T: Risk class: High. Data involved, per the vendor profile: payment instructions, counterparty names and account identifiers. Public evidence shows agentic AI and machine learning in the vendor's delivery operations (V-005-E-0001, V-005-E-0002, V-005-E-0008 and 5 more). One independent source corroborates it (V-005-E-0003). It is likely that the vendor uses AI in the service supporting inbound real-time payments. Confidence is low because the search of legal and trust pages (still pending), product pages and newsroom (still pending) and job postings (still pending) was not completed. Operational dependency is high, and the criticality tier is Critical. Five of six transparency checks are not publicly disclosed; contractual disclosure is unknown. Score: exposure 2/3, decision impact 3/3 (assumed), tier 3, transparency gap 2 → 15 of 18 = Critical. The Probable verdict caps the class at High. Ceiling Critical if confirmed. Independent confirmation of AI use in the service itself would lift the Probable cap and raise the class to Critical.</a:t>
+              <a:t>Column T: Risk class: High. Data (vendor profile): payment instructions, counterparty names and account identifiers. Public evidence shows agentic AI and machine learning in the vendor's delivery operations (V-005-E-0001, V-005-E-0002, V-005-E-0009 and 4 more). One independent source corroborates it (V-005-E-0003). It is likely that the vendor uses AI in the service supporting inbound real-time payments. Confidence is low: legal/trust, product/newsroom and job-posting searches were not completed. Operational dependency is high, and the criticality tier is Critical. Five of six transparency checks are not publicly disclosed; contractual disclosure is unknown. Score: exposure 2/3, decision impact 3/3 (assumed), tier 3, transparency gap 2 → 15 of 18 = Critical. The Probable verdict caps the class at High. Independent confirmation of AI use in the service would lift the Probable cap to Critical. Decision impact 3 is assumed (payment-path role); it falls if the vendor confirms AI outputs are advisory or human-reviewed.</a:t>
             </a:r>
           </a:p>
           <a:p>
@@ -2351,7 +2351,7 @@
           </a:p>
           <a:p>
             <a:r>
-              <a:t>Column T: Risk class: High. Data involved, per the vendor profile: payment messages in transit only (annual volume: 14 million messages). Public evidence shows generative AI (large language models) in the vendor's delivery operations (V-006-E-0001, V-006-E-0002, V-006-E-0009). It is likely that the vendor uses AI in the service supporting ACH and RTP clearing and settlement. Confidence is moderate because only one independent first-party or legally accountable source supports the finding. Operational dependency on the vendor for ACH and RTP clearing and settlement is critical, and the criticality tier is Critical. Five of six transparency checks are not publicly disclosed; contractual disclosure is unknown. Score: exposure 2/3, decision impact 3/3 (assumed), tier 3, transparency gap 2 → 15 of 18 = Critical (exposure and decision impact count double). The Probable verdict caps the class at High. Ceiling Critical if confirmed. Independent confirmation of AI use in the service itself would lift the Probable cap and raise the class to Critical.</a:t>
+              <a:t>Column T: Risk class: High. Data (vendor profile): payment messages in transit only (annual volume: 14 million messages). Public evidence shows generative AI (large language models) in the vendor's delivery operations (V-006-E-0001, V-006-E-0002, V-006-E-0009). It is likely that the vendor uses AI in the service supporting ACH and RTP clearing and settlement. Confidence is moderate because only one independent first-party or legally accountable source supports the finding. Operational dependency is critical, and the criticality tier is Critical. Five of six transparency checks are not publicly disclosed; contractual disclosure is unknown. Score: exposure 2/3, decision impact 3/3 (assumed), tier 3, transparency gap 2 → 15 of 18 = Critical. The Probable verdict caps the class at High. Independent confirmation of AI use in the service would lift the Probable cap to Critical. Decision impact 3 is assumed (payment-path role); it falls if the vendor confirms AI outputs are advisory or human-reviewed.</a:t>
             </a:r>
           </a:p>
           <a:p>
@@ -3016,12 +3016,12 @@
           </a:p>
           <a:p>
             <a:r>
-              <a:t>Trap shown: V-001 AutomWorx, V-001-E-0138, Homepage: "The Orchestration Layer of the Private Cloud. Running AI in Production Starts Below the Model"</a:t>
-            </a:r>
-          </a:p>
-          <a:p>
-            <a:r>
-              <a:t>Placeholder examples come from scouting; the build with --findings swaps in the verified excerpts and their Evidence Log IDs.</a:t>
+              <a:t>Trap shown: V-001 AutomWorx, V-001-E-0140, Homepage: "The Orchestration Layer of the Private Cloud. Running AI in Production Starts Below the Model"</a:t>
+            </a:r>
+          </a:p>
+          <a:p>
+            <a:r>
+              <a:t>Moderate item shown:V-002 Fiserv, V-002-E-0001, SEC Form DEFA14A (U3 · SR:A · SP:S3 · RL:R2 · RC:T3 · IC:2 · locus=delivery_ops): "Two weeks ago, we re-architected our client service portal to drive more self-service and agentic AI capabilities to resolve our tickets."</a:t>
             </a:r>
           </a:p>
         </p:txBody>
@@ -10168,7 +10168,7 @@
                   <a:srgbClr val="43535F"/>
                 </a:solidFill>
               </a:rPr>
-              <a:t>fiserv.com, bny.com, openai.com and linkedin.com (+3 more): analyst capture under a sampling protocol, never sent to Gemini</a:t>
+              <a:t>fiserv.com, bny.com, openai.com and linkedin.com (+3 more): analyst capture only (none this run); never sent to Gemini</a:t>
             </a:r>
             <a:endParaRPr sz="1200"/>
           </a:p>
@@ -10386,7 +10386,7 @@
                   <a:srgbClr val="0A5E5D"/>
                 </a:solidFill>
               </a:rPr>
-              <a:t>Fiserv: Yes (Probable) from a moderate sec form defa14a; exposure 2/3, decision impact 3/3, tier 3, transparency gap 2 → 15 of 18 = High.</a:t>
+              <a:t>Fiserv: Yes (Probable) from a moderate-strength SEC Form DEFA14A excerpt; exposure 2/3, decision impact 3/3, tier 3, transparency gap 2 → 15 of 18 = High.</a:t>
             </a:r>
             <a:endParaRPr sz="1200"/>
           </a:p>
@@ -11431,7 +11431,7 @@
                             <a:srgbClr val="43535F"/>
                           </a:solidFill>
                         </a:rPr>
-                        <a:t>Affiliate website, Labarum AI: </a:t>
+                        <a:t>Blog post, AutomWorx: </a:t>
                       </a:r>
                       <a:r>
                         <a:rPr sz="1000" b="0" i="1">
@@ -11439,7 +11439,7 @@
                             <a:srgbClr val="43535F"/>
                           </a:solidFill>
                         </a:rPr>
-                        <a:t>“Twenty years of platform depth across 250+ Fortune 1000 accounts gets […]”</a:t>
+                        <a:t>“The convergence of AI and workload automation marks a significant leap […]”</a:t>
                       </a:r>
                       <a:endParaRPr sz="1000"/>
                     </a:p>
@@ -11735,7 +11735,7 @@
                             <a:srgbClr val="43535F"/>
                           </a:solidFill>
                         </a:rPr>
-                        <a:t>“In the same research, 69% of mature adopters reported being satisfied with […]”</a:t>
+                        <a:t>“In this post, I’ll walk through the latest AI innovations we’ve […]”</a:t>
                       </a:r>
                       <a:endParaRPr sz="1000"/>
                     </a:p>
@@ -13947,7 +13947,7 @@
                   <a:srgbClr val="43535F"/>
                 </a:solidFill>
               </a:rPr>
-              <a:t>Fiserv's excerpt V-002-E-0002 with its screenshot, then Re-verify; reject AutomWorx's trap V-001-E-0138, which fails the definition test; compare Gemini with the rules on AutomWorx (90 disagreements).</a:t>
+              <a:t>Fiserv's excerpt V-002-E-0002 with its screenshot, then Re-verify; reject AutomWorx's trap V-001-E-0140, which fails the definition test; compare Gemini with the rules on AutomWorx (90 disagreements).</a:t>
             </a:r>
             <a:endParaRPr sz="1200"/>
           </a:p>
@@ -14221,7 +14221,7 @@
                   <a:srgbClr val="43535F"/>
                 </a:solidFill>
               </a:rPr>
-              <a:t>Build and open the workbook: V-000 untouched, Evidence Log and Coverage Log appended, with 14 screenshots in Evidence Images; the integrity check passes.</a:t>
+              <a:t>Build and open the workbook: V-000 untouched, Evidence Log and Coverage Log appended, with 9 screenshots in Evidence Images; the integrity check passes.</a:t>
             </a:r>
             <a:endParaRPr sz="1200"/>
           </a:p>
@@ -15705,7 +15705,7 @@
                   <a:srgbClr val="43535F"/>
                 </a:solidFill>
               </a:rPr>
-              <a:t>Terms register, robots.txt and rate limits before every request; barred sites captured by hand.</a:t>
+              <a:t>Terms register, robots.txt and rate limits before every request; barred hosts logged as gaps, not crawled.</a:t>
             </a:r>
             <a:endParaRPr sz="1200"/>
           </a:p>
@@ -23071,7 +23071,7 @@
                             <a:srgbClr val="43535F"/>
                           </a:solidFill>
                         </a:rPr>
-                        <a:t>Confirmation that the AI platform of the inferred affiliate Labarum AI delivers Meridian work would make the verdict Yes and could raise the class…</a:t>
+                        <a:t>Confirmation that the AI capability the vendor advertises is used in Meridian's service would make the verdict Yes and could raise the class to…</a:t>
                       </a:r>
                       <a:endParaRPr sz="1000"/>
                     </a:p>
@@ -24333,7 +24333,7 @@
                   <a:srgbClr val="66757F"/>
                 </a:solidFill>
               </a:rPr>
-              <a:t>Source: run A-20261003-46a58030 (live_ai), evidence as of 2026-10-03. Evidence Log IDs for every vendor claim are in the speaker notes; the workbook's cells L–V hold the full wording.</a:t>
+              <a:t>Source: run A-20261003-9e73747c (replay), evidence as of 2026-10-03. Evidence Log IDs for every vendor claim are in the speaker notes; the workbook's cells L–V hold the full wording.</a:t>
             </a:r>
             <a:endParaRPr sz="1200"/>
           </a:p>
@@ -24563,11 +24563,11 @@
         <p:spPr>
           <a:xfrm>
             <a:off x="502920" y="1645920"/>
-            <a:ext cx="6675120" cy="3200400"/>
+            <a:ext cx="6675120" cy="2926080"/>
           </a:xfrm>
           <a:prstGeom prst="roundRect">
             <a:avLst>
-              <a:gd name="adj" fmla="val 2857"/>
+              <a:gd name="adj" fmla="val 3125"/>
             </a:avLst>
           </a:prstGeom>
           <a:solidFill>
@@ -24625,7 +24625,7 @@
                   <a:srgbClr val="0A5E5D"/>
                 </a:solidFill>
               </a:rPr>
-              <a:t>V-001-E-0001 · Indicator · Context - inferred affiliate</a:t>
+              <a:t>V-001-E-0001 · Indicator · Marketing only</a:t>
             </a:r>
             <a:endParaRPr sz="1200"/>
           </a:p>
@@ -24637,7 +24637,7 @@
                   <a:srgbClr val="66757F"/>
                 </a:solidFill>
               </a:rPr>
-              <a:t>Affiliate website, Labarum AI, dated by retrieval</a:t>
+              <a:t>Blog post, AutomWorx, 2025-08-26</a:t>
             </a:r>
             <a:endParaRPr sz="1200"/>
           </a:p>
@@ -24649,7 +24649,7 @@
                   <a:srgbClr val="43535F"/>
                 </a:solidFill>
               </a:rPr>
-              <a:t>“Twenty years of platform depth across 250+ Fortune 1000 accounts gets extended by AI infrastructure built to run where customer data runs.”</a:t>
+              <a:t>“The convergence of AI and workload automation marks a significant leap forward for enterprises.”</a:t>
             </a:r>
             <a:endParaRPr sz="1200"/>
           </a:p>
@@ -24665,7 +24665,7 @@
                   <a:srgbClr val="0A5E5D"/>
                 </a:solidFill>
               </a:rPr>
-              <a:t>V-001-E-0002 · Indicator · Context - inferred affiliate</a:t>
+              <a:t>V-001-E-0002 · Indicator · Marketing only</a:t>
             </a:r>
             <a:endParaRPr sz="1200"/>
           </a:p>
@@ -24677,7 +24677,7 @@
                   <a:srgbClr val="66757F"/>
                 </a:solidFill>
               </a:rPr>
-              <a:t>Affiliate website, Labarum AI, dated by retrieval</a:t>
+              <a:t>Blog post, AutomWorx, 2026-09-03</a:t>
             </a:r>
             <a:endParaRPr sz="1200"/>
           </a:p>
@@ -24689,7 +24689,7 @@
                   <a:srgbClr val="43535F"/>
                 </a:solidFill>
               </a:rPr>
-              <a:t>“Agencies engage Labarum AI for enterprise workload automation migrations, managed support of production scheduling environments, modernization of legacy schedulers, and the AI-enabled operating model that brings federal-grade […]”</a:t>
+              <a:t>“A lot of AI and infrastructure modernization talk stays focused on the infrastructure itself, faster provisioning, more flexible platforms, better tooling.”</a:t>
             </a:r>
             <a:endParaRPr sz="1200"/>
           </a:p>
@@ -24717,7 +24717,7 @@
                   <a:srgbClr val="43535F"/>
                 </a:solidFill>
               </a:rPr>
-              <a:t>No usage pathway is evidenced in public material. AI options of Broadcom, a platform supplier the vendor uses (Gemini, OpenAI, Ollama, Google, and VMware Private AI), are a relationship indicator, not a confirmed sub-processor (V-001-E-0003, V-001-E-0004, V-001-E-0005 and 70 more). AI and generative AI (large language models) described by an inferred…</a:t>
+              <a:t>No usage pathway is evidenced in public material. AI options of Broadcom, a platform supplier the vendor uses (Gemini, OpenAI, Ollama, Google, and VMware Private AI), are a relationship indicator, not a confirmed sub-processor (V-001-E-0003, V-001-E-0004, V-001-E-0005 and 70 more). Marketing or forward-looking statements about AI are not confirmatory…</a:t>
             </a:r>
             <a:endParaRPr sz="1200"/>
           </a:p>
@@ -24731,12 +24731,12 @@
         </p:nvSpPr>
         <p:spPr>
           <a:xfrm>
-            <a:off x="502920" y="4983480"/>
-            <a:ext cx="6675120" cy="1234440"/>
+            <a:off x="502920" y="4709160"/>
+            <a:ext cx="6675120" cy="1508760"/>
           </a:xfrm>
           <a:prstGeom prst="roundRect">
             <a:avLst>
-              <a:gd name="adj" fmla="val 7407"/>
+              <a:gd name="adj" fmla="val 6060"/>
             </a:avLst>
           </a:prstGeom>
           <a:solidFill>
@@ -24822,7 +24822,7 @@
                   <a:srgbClr val="66757F"/>
                 </a:solidFill>
               </a:rPr>
-              <a:t>Definition-test trap kept in the log, never cited: V-001-E-0138.</a:t>
+              <a:t>Definition-test trap kept in the log, never cited: V-001-E-0140.</a:t>
             </a:r>
             <a:endParaRPr sz="1200"/>
           </a:p>
@@ -24996,7 +24996,7 @@
                   <a:srgbClr val="43535F"/>
                 </a:solidFill>
               </a:rPr>
-              <a:t>Confirmation that the AI platform of the inferred affiliate Labarum AI delivers Meridian work would make the verdict Yes and could raise the class to Critical.</a:t>
+              <a:t>Confirmation that the AI capability the vendor advertises is used in Meridian's service would make the verdict Yes and could raise the class to Critical.</a:t>
             </a:r>
             <a:endParaRPr sz="1200"/>
           </a:p>
@@ -25315,11 +25315,11 @@
         <p:spPr>
           <a:xfrm>
             <a:off x="502920" y="1645920"/>
-            <a:ext cx="6675120" cy="3200400"/>
+            <a:ext cx="6675120" cy="2926080"/>
           </a:xfrm>
           <a:prstGeom prst="roundRect">
             <a:avLst>
-              <a:gd name="adj" fmla="val 2857"/>
+              <a:gd name="adj" fmla="val 3125"/>
             </a:avLst>
           </a:prstGeom>
           <a:solidFill>
@@ -25469,7 +25469,7 @@
                   <a:srgbClr val="43535F"/>
                 </a:solidFill>
               </a:rPr>
-              <a:t>Two usage pathways are indicated. First, agentic AI in the vendor's delivery operations, described as "resolve our tickets", "resolve client issues", and "onboarding", applied to tickets (V-002-E-0001, V-002-E-0014, V-002-E-0015). Second, generative AI and machine learning in the vendor's software development, described as "code generation" and "fraud…</a:t>
+              <a:t>Two usage pathways are indicated. First, agentic AI in the vendor's delivery operations, described as "resolve our tickets", "resolve client issues", and "onboarding", applied to tickets (V-002-E-0001, V-002-E-0012, V-002-E-0013). Second, generative AI and machine learning in the vendor's software development, described as "code generation" and "fraud…</a:t>
             </a:r>
             <a:endParaRPr sz="1200"/>
           </a:p>
@@ -25483,12 +25483,12 @@
         </p:nvSpPr>
         <p:spPr>
           <a:xfrm>
-            <a:off x="502920" y="4983480"/>
-            <a:ext cx="6675120" cy="1234440"/>
+            <a:off x="502920" y="4709160"/>
+            <a:ext cx="6675120" cy="1508760"/>
           </a:xfrm>
           <a:prstGeom prst="roundRect">
             <a:avLst>
-              <a:gd name="adj" fmla="val 7407"/>
+              <a:gd name="adj" fmla="val 6060"/>
             </a:avLst>
           </a:prstGeom>
           <a:solidFill>
@@ -25558,7 +25558,7 @@
                   <a:srgbClr val="43535F"/>
                 </a:solidFill>
               </a:rPr>
-              <a:t>AI providers: named by the vendor: agentOS, Finxact, NVIDIA, OpenAI, Personetics; named only by third parties: Cognition, Microsoft; DNS token only: Anthropic</a:t>
+              <a:t>AI providers: named by the vendor: agentOS, Finxact, NVIDIA, OpenAI, Personetics; named only by third parties: Microsoft; DNS token only: Anthropic</a:t>
             </a:r>
             <a:endParaRPr sz="1200"/>
           </a:p>
@@ -26051,11 +26051,11 @@
         <p:spPr>
           <a:xfrm>
             <a:off x="502920" y="1645920"/>
-            <a:ext cx="6675120" cy="3200400"/>
+            <a:ext cx="6675120" cy="2926080"/>
           </a:xfrm>
           <a:prstGeom prst="roundRect">
             <a:avLst>
-              <a:gd name="adj" fmla="val 2857"/>
+              <a:gd name="adj" fmla="val 3125"/>
             </a:avLst>
           </a:prstGeom>
           <a:solidFill>
@@ -26137,7 +26137,7 @@
                   <a:srgbClr val="43535F"/>
                 </a:solidFill>
               </a:rPr>
-              <a:t>“In the same research, 69% of mature adopters reported being satisfied with their return on AI investment (ROAI), compared with 42% of newer adopters.”</a:t>
+              <a:t>“In this post, I’ll walk through the latest AI innovations we’ve incorporated into OpenText™ Experience Cloud across content, communications, and digital assets workflows.”</a:t>
             </a:r>
             <a:endParaRPr sz="1200"/>
           </a:p>
@@ -26177,7 +26177,7 @@
                   <a:srgbClr val="43535F"/>
                 </a:solidFill>
               </a:rPr>
-              <a:t>“In this post, I’ll walk through the latest AI innovations we’ve incorporated into OpenText™ Experience Cloud across content, communications, and digital assets workflows.”</a:t>
+              <a:t>“Built into the OpenText Experience Cloud, it’s AI for the full content-to-experience lifecycle, including text, image, structure, and system.”</a:t>
             </a:r>
             <a:endParaRPr sz="1200"/>
           </a:p>
@@ -26217,7 +26217,7 @@
                   <a:srgbClr val="43535F"/>
                 </a:solidFill>
               </a:rPr>
-              <a:t>“Built into the OpenText Experience Cloud, it’s AI for the full content-to-experience lifecycle, including text, image, structure, and system.”</a:t>
+              <a:t>“It helps marketers and designers reuse and adapt templates and layouts with smart, component-aware GenAI.”</a:t>
             </a:r>
             <a:endParaRPr sz="1200"/>
           </a:p>
@@ -26231,12 +26231,12 @@
         </p:nvSpPr>
         <p:spPr>
           <a:xfrm>
-            <a:off x="502920" y="4983480"/>
-            <a:ext cx="6675120" cy="1234440"/>
+            <a:off x="502920" y="4709160"/>
+            <a:ext cx="6675120" cy="1508760"/>
           </a:xfrm>
           <a:prstGeom prst="roundRect">
             <a:avLst>
-              <a:gd name="adj" fmla="val 7407"/>
+              <a:gd name="adj" fmla="val 6060"/>
             </a:avLst>
           </a:prstGeom>
           <a:solidFill>
@@ -26783,11 +26783,11 @@
         <p:spPr>
           <a:xfrm>
             <a:off x="502920" y="1645920"/>
-            <a:ext cx="6675120" cy="3200400"/>
+            <a:ext cx="6675120" cy="2926080"/>
           </a:xfrm>
           <a:prstGeom prst="roundRect">
             <a:avLst>
-              <a:gd name="adj" fmla="val 2857"/>
+              <a:gd name="adj" fmla="val 3125"/>
             </a:avLst>
           </a:prstGeom>
           <a:solidFill>
@@ -26951,12 +26951,12 @@
         </p:nvSpPr>
         <p:spPr>
           <a:xfrm>
-            <a:off x="502920" y="4983480"/>
-            <a:ext cx="6675120" cy="1234440"/>
+            <a:off x="502920" y="4709160"/>
+            <a:ext cx="6675120" cy="1508760"/>
           </a:xfrm>
           <a:prstGeom prst="roundRect">
             <a:avLst>
-              <a:gd name="adj" fmla="val 7407"/>
+              <a:gd name="adj" fmla="val 6060"/>
             </a:avLst>
           </a:prstGeom>
           <a:solidFill>
@@ -27519,11 +27519,11 @@
         <p:spPr>
           <a:xfrm>
             <a:off x="502920" y="1645920"/>
-            <a:ext cx="6675120" cy="3200400"/>
+            <a:ext cx="6675120" cy="2926080"/>
           </a:xfrm>
           <a:prstGeom prst="roundRect">
             <a:avLst>
-              <a:gd name="adj" fmla="val 2857"/>
+              <a:gd name="adj" fmla="val 3125"/>
             </a:avLst>
           </a:prstGeom>
           <a:solidFill>
@@ -27699,12 +27699,12 @@
         </p:nvSpPr>
         <p:spPr>
           <a:xfrm>
-            <a:off x="502920" y="4983480"/>
-            <a:ext cx="6675120" cy="1234440"/>
+            <a:off x="502920" y="4709160"/>
+            <a:ext cx="6675120" cy="1508760"/>
           </a:xfrm>
           <a:prstGeom prst="roundRect">
             <a:avLst>
-              <a:gd name="adj" fmla="val 7407"/>
+              <a:gd name="adj" fmla="val 6060"/>
             </a:avLst>
           </a:prstGeom>
           <a:solidFill>
@@ -28283,11 +28283,11 @@
         <p:spPr>
           <a:xfrm>
             <a:off x="502920" y="1645920"/>
-            <a:ext cx="6675120" cy="3200400"/>
+            <a:ext cx="6675120" cy="2926080"/>
           </a:xfrm>
           <a:prstGeom prst="roundRect">
             <a:avLst>
-              <a:gd name="adj" fmla="val 2857"/>
+              <a:gd name="adj" fmla="val 3125"/>
             </a:avLst>
           </a:prstGeom>
           <a:solidFill>
@@ -28463,12 +28463,12 @@
         </p:nvSpPr>
         <p:spPr>
           <a:xfrm>
-            <a:off x="502920" y="4983480"/>
-            <a:ext cx="6675120" cy="1234440"/>
+            <a:off x="502920" y="4709160"/>
+            <a:ext cx="6675120" cy="1508760"/>
           </a:xfrm>
           <a:prstGeom prst="roundRect">
             <a:avLst>
-              <a:gd name="adj" fmla="val 7407"/>
+              <a:gd name="adj" fmla="val 6060"/>
             </a:avLst>
           </a:prstGeom>
           <a:solidFill>
@@ -34338,7 +34338,7 @@
                   <a:srgbClr val="43535F"/>
                 </a:solidFill>
               </a:rPr>
-              <a:t>fiserv.com and linkedin.com are captured by an analyst, never crawled or sent to Gemini</a:t>
+              <a:t>fiserv.com and linkedin.com: analyst capture only (not performed this run); never crawled or sent to Gemini</a:t>
             </a:r>
             <a:endParaRPr sz="1200"/>
           </a:p>
@@ -40452,7 +40452,7 @@
                 </a:solidFill>
                 <a:latin typeface="Consolas"/>
               </a:rPr>
-              <a:t>U1 · SR:B · SP:S2 · RL:R3 · RC:T3 · IC:1 · locus=service_feature</a:t>
+              <a:t>U3 · SR:A · SP:S3 · RL:R2 · RC:T3 · IC:2 · locus=delivery_ops</a:t>
             </a:r>
             <a:endParaRPr sz="1200"/>
           </a:p>
@@ -42174,7 +42174,7 @@
                   <a:srgbClr val="0C2D36"/>
                 </a:solidFill>
               </a:rPr>
-              <a:t>AutomWorx · Homepage · V-001-E-0138</a:t>
+              <a:t>AutomWorx · Homepage · V-001-E-0140</a:t>
             </a:r>
             <a:endParaRPr sz="1200"/>
           </a:p>
@@ -42263,7 +42263,7 @@
                   <a:srgbClr val="0A5E5D"/>
                 </a:solidFill>
               </a:rPr>
-              <a:t>Strong · cited</a:t>
+              <a:t>Moderate · cited</a:t>
             </a:r>
             <a:endParaRPr sz="1200"/>
           </a:p>
@@ -42275,7 +42275,7 @@
                   <a:srgbClr val="0C2D36"/>
                 </a:solidFill>
               </a:rPr>
-              <a:t>BNY · scouting example</a:t>
+              <a:t>Fiserv · SEC Form DEFA14A · V-002-E-0001</a:t>
             </a:r>
             <a:endParaRPr sz="1200"/>
           </a:p>
@@ -42287,7 +42287,7 @@
                   <a:srgbClr val="43535F"/>
                 </a:solidFill>
               </a:rPr>
-              <a:t>The instant-payments product page ties AI-enabled anomaly detection to its RTP network connection.</a:t>
+              <a:t>“Two weeks ago, we re-architected our client service portal to drive more self-service and agentic AI capabilities to resolve our tickets.”</a:t>
             </a:r>
             <a:endParaRPr sz="1200"/>
           </a:p>
@@ -42303,7 +42303,7 @@
                   <a:srgbClr val="43535F"/>
                 </a:solidFill>
               </a:rPr>
-              <a:t>U1 · SR B · RL R3 → Strong: the Primary source for a Yes (Confirmed) verdict.</a:t>
+              <a:t>U3 · SR:A · SP:S3 · RL:R2 · RC:T3 · IC:2 · locus=delivery_ops → Moderate; Primary source for Yes (Probable).</a:t>
             </a:r>
             <a:endParaRPr sz="1200"/>
           </a:p>
